--- a/Notes/02_1_RenderingBasics.pptx
+++ b/Notes/02_1_RenderingBasics.pptx
@@ -226,7 +226,7 @@
           <a:p>
             <a:fld id="{1558EF9E-F90D-3644-932C-1F90C8EF183B}" type="datetimeFigureOut">
               <a:rPr kumimoji="1" lang="ko-KR" altLang="en-US" smtClean="0"/>
-              <a:t>2025. 2. 21.</a:t>
+              <a:t>2025-09-19</a:t>
             </a:fld>
             <a:endParaRPr kumimoji="1" lang="ko-KR" altLang="en-US"/>
           </a:p>
@@ -518,14 +518,14 @@
           <a:ln/>
           <a:extLst>
             <a:ext uri="{909E8E84-426E-40dd-AFC4-6F175D3DCCD1}">
-              <a14:hiddenFill xmlns="" xmlns:a14="http://schemas.microsoft.com/office/drawing/2010/main">
+              <a14:hiddenFill xmlns:a14="http://schemas.microsoft.com/office/drawing/2010/main" xmlns="">
                 <a:solidFill>
                   <a:srgbClr val="FFFFFF"/>
                 </a:solidFill>
               </a14:hiddenFill>
             </a:ext>
             <a:ext uri="{91240B29-F687-4f45-9708-019B960494DF}">
-              <a14:hiddenLine xmlns="" xmlns:a14="http://schemas.microsoft.com/office/drawing/2010/main" w="9525">
+              <a14:hiddenLine xmlns:a14="http://schemas.microsoft.com/office/drawing/2010/main" xmlns="" w="9525">
                 <a:solidFill>
                   <a:srgbClr val="000000"/>
                 </a:solidFill>
@@ -584,14 +584,14 @@
           <a:ln/>
           <a:extLst>
             <a:ext uri="{909E8E84-426E-40dd-AFC4-6F175D3DCCD1}">
-              <a14:hiddenFill xmlns="" xmlns:a14="http://schemas.microsoft.com/office/drawing/2010/main">
+              <a14:hiddenFill xmlns:a14="http://schemas.microsoft.com/office/drawing/2010/main" xmlns="">
                 <a:solidFill>
                   <a:srgbClr val="FFFFFF"/>
                 </a:solidFill>
               </a14:hiddenFill>
             </a:ext>
             <a:ext uri="{91240B29-F687-4f45-9708-019B960494DF}">
-              <a14:hiddenLine xmlns="" xmlns:a14="http://schemas.microsoft.com/office/drawing/2010/main" w="9525">
+              <a14:hiddenLine xmlns:a14="http://schemas.microsoft.com/office/drawing/2010/main" xmlns="" w="9525">
                 <a:solidFill>
                   <a:srgbClr val="000000"/>
                 </a:solidFill>
@@ -12830,7 +12830,7 @@
         </p:nvSpPr>
         <p:spPr>
           <a:xfrm>
-            <a:off x="3791744" y="2636912"/>
+            <a:off x="2675193" y="2651728"/>
             <a:ext cx="216024" cy="216024"/>
           </a:xfrm>
           <a:prstGeom prst="rect">
@@ -12872,7 +12872,7 @@
         </p:nvSpPr>
         <p:spPr>
           <a:xfrm>
-            <a:off x="4367808" y="2924944"/>
+            <a:off x="3143245" y="2939760"/>
             <a:ext cx="216024" cy="216024"/>
           </a:xfrm>
           <a:prstGeom prst="rect">
@@ -12914,7 +12914,7 @@
         </p:nvSpPr>
         <p:spPr>
           <a:xfrm>
-            <a:off x="9097941" y="3599728"/>
+            <a:off x="8400256" y="3614543"/>
             <a:ext cx="216024" cy="216024"/>
           </a:xfrm>
           <a:prstGeom prst="rect">
@@ -12933,6 +12933,15 @@
           <a:lstStyle/>
           <a:p>
             <a:pPr algn="l"/>
+            <a:r>
+              <a:rPr kumimoji="1" lang="en-US" altLang="ko-KR" b="1" dirty="0">
+                <a:solidFill>
+                  <a:srgbClr val="9B2393"/>
+                </a:solidFill>
+                <a:latin typeface="Menlo" panose="020B0609030804020204" pitchFamily="49" charset="0"/>
+              </a:rPr>
+              <a:t>……………………………………</a:t>
+            </a:r>
             <a:endParaRPr kumimoji="1" lang="ko-KR" altLang="en-US" b="1" dirty="0">
               <a:solidFill>
                 <a:srgbClr val="9B2393"/>
@@ -12960,8 +12969,8 @@
         </p:nvCxnSpPr>
         <p:spPr>
           <a:xfrm rot="16200000" flipH="1">
-            <a:off x="4043772" y="2708920"/>
-            <a:ext cx="180020" cy="468052"/>
+            <a:off x="2873215" y="2777742"/>
+            <a:ext cx="180020" cy="360040"/>
           </a:xfrm>
           <a:prstGeom prst="bentConnector2">
             <a:avLst/>
@@ -13006,12 +13015,12 @@
         </p:nvCxnSpPr>
         <p:spPr>
           <a:xfrm rot="16200000" flipH="1">
-            <a:off x="6611506" y="1005281"/>
-            <a:ext cx="458760" cy="4730133"/>
+            <a:off x="5650383" y="756657"/>
+            <a:ext cx="458759" cy="5257011"/>
           </a:xfrm>
           <a:prstGeom prst="bentConnector3">
             <a:avLst>
-              <a:gd name="adj1" fmla="val 19694"/>
+              <a:gd name="adj1" fmla="val 50000"/>
             </a:avLst>
           </a:prstGeom>
           <a:ln>
